--- a/courses/俄语课件/俄语_Day6_L1.pptx
+++ b/courses/俄语课件/俄语_Day6_L1.pptx
@@ -3207,59 +3207,7 @@
       </p:sp>
       <p:sp>
         <p:nvSpPr>
-          <p:cNvPr id="5" name="Rounded Rectangle 4"/>
-          <p:cNvSpPr/>
-          <p:nvPr/>
-        </p:nvSpPr>
-        <p:spPr>
-          <a:xfrm>
-            <a:off x="1828800" y="4572000"/>
-            <a:ext cx="5486400" cy="731520"/>
-          </a:xfrm>
-          <a:prstGeom prst="roundRect">
-            <a:avLst/>
-          </a:prstGeom>
-          <a:solidFill>
-            <a:srgbClr val="4682B4"/>
-          </a:solidFill>
-          <a:ln>
-            <a:noFill/>
-          </a:ln>
-        </p:spPr>
-        <p:style>
-          <a:lnRef idx="1">
-            <a:schemeClr val="accent1"/>
-          </a:lnRef>
-          <a:fillRef idx="3">
-            <a:schemeClr val="accent1"/>
-          </a:fillRef>
-          <a:effectRef idx="2">
-            <a:schemeClr val="accent1"/>
-          </a:effectRef>
-          <a:fontRef idx="minor">
-            <a:schemeClr val="lt1"/>
-          </a:fontRef>
-        </p:style>
-        <p:txBody>
-          <a:bodyPr rtlCol="0" anchor="ctr"/>
-          <a:lstStyle/>
-          <a:p>
-            <a:pPr algn="ctr">
-              <a:defRPr sz="2200">
-                <a:solidFill>
-                  <a:srgbClr val="FFFFFF"/>
-                </a:solidFill>
-              </a:defRPr>
-            </a:pPr>
-            <a:r>
-              <a:t>Soglasovaniye 1</a:t>
-            </a:r>
-          </a:p>
-        </p:txBody>
-      </p:sp>
-      <p:sp>
-        <p:nvSpPr>
-          <p:cNvPr id="6" name="TextBox 5"/>
+          <p:cNvPr id="5" name="TextBox 4"/>
           <p:cNvSpPr txBox="1"/>
           <p:nvPr/>
         </p:nvSpPr>
@@ -3287,7 +3235,7 @@
               </a:defRPr>
             </a:pPr>
             <a:r>
-              <a:t>Day6/84</a:t>
+              <a:t>День 6/84</a:t>
             </a:r>
           </a:p>
         </p:txBody>
@@ -3418,7 +3366,7 @@
               </a:defRPr>
             </a:pPr>
             <a:r>
-              <a:t>Soglasovaniye prilagatelnykh</a:t>
+              <a:t>Согласование прилагательных</a:t>
             </a:r>
           </a:p>
         </p:txBody>
@@ -3523,7 +3471,7 @@
               </a:defRPr>
             </a:pPr>
             <a:r>
-              <a:t>阴性：большая kniga (大书)</a:t>
+              <a:t>阴性：большая книга (大书)</a:t>
             </a:r>
           </a:p>
         </p:txBody>
@@ -3558,7 +3506,7 @@
               </a:defRPr>
             </a:pPr>
             <a:r>
-              <a:t>中性：большoye okno (大窗户)</a:t>
+              <a:t>中性：большое окно (大窗户)</a:t>
             </a:r>
           </a:p>
         </p:txBody>
@@ -3645,7 +3593,7 @@
               </a:defRPr>
             </a:pPr>
             <a:r>
-              <a:t>Day6/84</a:t>
+              <a:t>День 6/84</a:t>
             </a:r>
           </a:p>
         </p:txBody>
@@ -3776,7 +3724,7 @@
               </a:defRPr>
             </a:pPr>
             <a:r>
-              <a:t>Okonchaniya</a:t>
+              <a:t>Окончания</a:t>
             </a:r>
           </a:p>
         </p:txBody>
@@ -3846,7 +3794,7 @@
               </a:defRPr>
             </a:pPr>
             <a:r>
-              <a:t>новый (新的) &gt; нового, новому...</a:t>
+              <a:t>новый (新的) → нового, новому...</a:t>
             </a:r>
           </a:p>
         </p:txBody>
@@ -3881,7 +3829,7 @@
               </a:defRPr>
             </a:pPr>
             <a:r>
-              <a:t>большой (大的) &gt; большого, большому...</a:t>
+              <a:t>большой (大的) → большого, большому...</a:t>
             </a:r>
           </a:p>
         </p:txBody>
@@ -3951,7 +3899,7 @@
               </a:defRPr>
             </a:pPr>
             <a:r>
-              <a:t>хороший (好的) &gt; хорошего, хорошему...</a:t>
+              <a:t>хороший (好的) → хорошего, хорошему...</a:t>
             </a:r>
           </a:p>
         </p:txBody>
@@ -4038,7 +3986,7 @@
               </a:defRPr>
             </a:pPr>
             <a:r>
-              <a:t>Day6/84</a:t>
+              <a:t>День 6/84</a:t>
             </a:r>
           </a:p>
         </p:txBody>
@@ -4169,7 +4117,7 @@
               </a:defRPr>
             </a:pPr>
             <a:r>
-              <a:t>Zhenskiy rod</a:t>
+              <a:t>Женский род</a:t>
             </a:r>
           </a:p>
         </p:txBody>
@@ -4239,7 +4187,7 @@
               </a:defRPr>
             </a:pPr>
             <a:r>
-              <a:t>новый &gt; новая kniga (新书)</a:t>
+              <a:t>новый → новая книга (新书)</a:t>
             </a:r>
           </a:p>
         </p:txBody>
@@ -4274,90 +4222,20 @@
               </a:defRPr>
             </a:pPr>
             <a:r>
-              <a:t>хороший &gt; хорошая devushka (好姑娘)</a:t>
-            </a:r>
-          </a:p>
-        </p:txBody>
-      </p:sp>
-      <p:sp>
-        <p:nvSpPr>
-          <p:cNvPr id="8" name="TextBox 7"/>
-          <p:cNvSpPr txBox="1"/>
-          <p:nvPr/>
-        </p:nvSpPr>
-        <p:spPr>
-          <a:xfrm>
-            <a:off x="457200" y="2596896"/>
-            <a:ext cx="8229600" cy="365760"/>
-          </a:xfrm>
-          <a:prstGeom prst="rect">
-            <a:avLst/>
-          </a:prstGeom>
-          <a:noFill/>
-        </p:spPr>
-        <p:txBody>
-          <a:bodyPr wrap="none">
-            <a:spAutoFit/>
-          </a:bodyPr>
-          <a:lstStyle/>
-          <a:p>
-            <a:pPr>
-              <a:defRPr sz="1600" b="1">
-                <a:solidFill>
-                  <a:srgbClr val="1E3C72"/>
-                </a:solidFill>
-              </a:defRPr>
-            </a:pPr>
-            <a:r>
-              <a:t>特殊：</a:t>
-            </a:r>
-          </a:p>
-        </p:txBody>
-      </p:sp>
-      <p:sp>
-        <p:nvSpPr>
-          <p:cNvPr id="9" name="TextBox 8"/>
-          <p:cNvSpPr txBox="1"/>
-          <p:nvPr/>
-        </p:nvSpPr>
-        <p:spPr>
-          <a:xfrm>
-            <a:off x="457200" y="2962656"/>
-            <a:ext cx="8229600" cy="365760"/>
-          </a:xfrm>
-          <a:prstGeom prst="rect">
-            <a:avLst/>
-          </a:prstGeom>
-          <a:noFill/>
-        </p:spPr>
-        <p:txBody>
-          <a:bodyPr wrap="none">
-            <a:spAutoFit/>
-          </a:bodyPr>
-          <a:lstStyle/>
-          <a:p>
-            <a:pPr>
-              <a:defRPr sz="1500">
-                <a:solidFill>
-                  <a:srgbClr val="333333"/>
-                </a:solidFill>
-              </a:defRPr>
-            </a:pPr>
-            <a:r>
-              <a:t>большой &gt; большая komnata (大房间)</a:t>
-            </a:r>
-          </a:p>
-        </p:txBody>
-      </p:sp>
-      <p:sp>
-        <p:nvSpPr>
-          <p:cNvPr id="10" name="Rounded Rectangle 9"/>
+              <a:t>хороший → хорошая девушка (好姑娘)</a:t>
+            </a:r>
+          </a:p>
+        </p:txBody>
+      </p:sp>
+      <p:sp>
+        <p:nvSpPr>
+          <p:cNvPr id="8" name="Rounded Rectangle 7"/>
           <p:cNvSpPr/>
           <p:nvPr/>
         </p:nvSpPr>
         <p:spPr>
           <a:xfrm>
-            <a:off x="457200" y="3346703"/>
+            <a:off x="457200" y="2596896"/>
             <a:ext cx="8229600" cy="457200"/>
           </a:xfrm>
           <a:prstGeom prst="roundRect">
@@ -4403,7 +4281,7 @@
       </p:sp>
       <p:sp>
         <p:nvSpPr>
-          <p:cNvPr id="11" name="TextBox 10"/>
+          <p:cNvPr id="9" name="TextBox 8"/>
           <p:cNvSpPr txBox="1"/>
           <p:nvPr/>
         </p:nvSpPr>
@@ -4431,7 +4309,7 @@
               </a:defRPr>
             </a:pPr>
             <a:r>
-              <a:t>Day6/84</a:t>
+              <a:t>День 6/84</a:t>
             </a:r>
           </a:p>
         </p:txBody>
@@ -4562,7 +4440,7 @@
               </a:defRPr>
             </a:pPr>
             <a:r>
-              <a:t>Uprazhneniya</a:t>
+              <a:t>Упражнения</a:t>
             </a:r>
           </a:p>
         </p:txBody>
@@ -4909,7 +4787,7 @@
               </a:defRPr>
             </a:pPr>
             <a:r>
-              <a:t>Day6/84</a:t>
+              <a:t>День 6/84</a:t>
             </a:r>
           </a:p>
         </p:txBody>
